--- a/decks/triple-b5/triple-b5_ch5_bacterial-viral.pptx
+++ b/decks/triple-b5/triple-b5_ch5_bacterial-viral.pptx
@@ -130,30 +130,30 @@
   <p:extLst>
     <p:ext uri="{521415D9-36F7-43E2-AB2F-B90AF26B5E84}">
       <p14:sectionLst xmlns:p14="http://schemas.microsoft.com/office/powerpoint/2010/main">
-        <p14:section name="Opening" id="{715e0821-3e0b-7588-9fbe-d9b6c94666ee}">
+        <p14:section name="Opening" id="{782b4c9b-2279-f6ca-b493-6bc85331704b}">
           <p14:sldIdLst>
             <p14:sldId id="256"/>
           </p14:sldIdLst>
         </p14:section>
-        <p14:section name="Gate" id="{fb3b0dd2-6550-0d6e-7d2f-13c5c297e42d}">
+        <p14:section name="Gate" id="{a2164055-a95c-4e6c-8e99-815b4947280d}">
           <p14:sldIdLst>
             <p14:sldId id="257"/>
             <p14:sldId id="258"/>
           </p14:sldIdLst>
         </p14:section>
-        <p14:section name="Pre-teach" id="{1cfe7dc1-67c5-fbb7-7cd9-63634819087e}">
+        <p14:section name="Pre-teach" id="{268dc6fb-7cc3-d214-2d20-b7bd49c562cd}">
           <p14:sldIdLst>
             <p14:sldId id="259"/>
             <p14:sldId id="260"/>
           </p14:sldIdLst>
         </p14:section>
-        <p14:section name="Read-along" id="{effb396a-633d-f7dc-e5d6-c19dde912fc3}">
+        <p14:section name="Read-along" id="{147f3d5e-48d5-83f6-7555-7334e50e94fd}">
           <p14:sldIdLst>
             <p14:sldId id="261"/>
             <p14:sldId id="262"/>
           </p14:sldIdLst>
         </p14:section>
-        <p14:section name="Teach" id="{10b96b6f-d9ae-7d97-3335-f5035b39d149}">
+        <p14:section name="Teach" id="{d0b0f45e-ca7f-3776-00a3-be5c3aa8b950}">
           <p14:sldIdLst>
             <p14:sldId id="263"/>
             <p14:sldId id="264"/>
@@ -165,7 +165,7 @@
             <p14:sldId id="270"/>
           </p14:sldIdLst>
         </p14:section>
-        <p14:section name="Routes" id="{2e30af0d-ed66-0a18-7d31-3c20665d4df7}">
+        <p14:section name="Routes" id="{00c3d41e-a18a-8400-ebc4-96403ea1ef68}">
           <p14:sldIdLst>
             <p14:sldId id="271"/>
             <p14:sldId id="272"/>
@@ -174,12 +174,12 @@
             <p14:sldId id="275"/>
           </p14:sldIdLst>
         </p14:section>
-        <p14:section name="Close" id="{59ec6f98-9815-203f-9925-553dbe86dc95}">
+        <p14:section name="Close" id="{870ca783-7400-883b-7c7a-f3208c015c7c}">
           <p14:sldIdLst>
             <p14:sldId id="276"/>
           </p14:sldIdLst>
         </p14:section>
-        <p14:section name="Answers" id="{56abf656-d3a3-c615-26d6-bbd9b88596d2}">
+        <p14:section name="Answers" id="{813c8c73-42a8-4bbf-1bad-03b8f52f8fad}">
           <p14:sldIdLst>
             <p14:sldId id="277"/>
             <p14:sldId id="278"/>
@@ -1609,9 +1609,9 @@
             <a:r>
               <a:rPr lang="en-US" dirty="0"/>
               <a:t>Do now — retrieval. Silent, no notes, no help: recall comes before any support. Give about four minutes.
-1. Which type of pathogen causes measles?  →  A   A virus
+1. Which type of pathogen causes measles?  →  B   A virus
 2. Salmonella food poisoning is a ___ disease spread in food.  →  bacterial
-3. How is HIV spread from person to person?  →  A   By sexual contact or exchange of body fluids such as blood
+3. How is HIV spread from person to person?  →  C   By sexual contact or exchange of body fluids such as blood
 Circulate: who gets 3/3 (Stretch route), 2/3 (Core), 0–1 (Support)? Use this to route pupils later in the lesson.</a:t>
             </a:r>
             <a:endParaRPr lang="en-US" dirty="0"/>
@@ -1796,7 +1796,7 @@
               <a:rPr lang="en-US" dirty="0"/>
               <a:t>Exit ticket — individual, silent, on a slip or mini-whiteboard. Recall before help: no notes, no lanes, no hints. Collect before pupils leave.
 Question: Which type of pathogen causes measles?
-Answer: D   A virus. Measles is a viral disease spread in droplets from coughs and sneezes; it causes fever and a red skin rash.
+Answer: A   A virus. Measles is a viral disease spread in droplets from coughs and sneezes; it causes fever and a red skin rash.
 Source of this question: gate item 1 re-asked (options rotated) — this chapter has no third quick-check module.
 The ebook also holds task 3, "Why antibiotics fail against measles (6 marks)", for homework or the next lesson's do now.
 Sort the slips: correct → ready to move on; incorrect → start next lesson in the pre-teach group, with the read-along and the Support lane. Same destination next time.</a:t>
@@ -2070,7 +2070,7 @@
             <a:r>
               <a:rPr lang="en-US" dirty="0"/>
               <a:t>Answers — exit ticket: Exit ticket. Reveal the answer; pupils mark their own work in a different colour, then read the "why" together. Same destination for every lane, so one answer serves the whole class.
-Answer: D   A virus
+Answer: A   A virus
 Why: Measles is a viral disease spread in droplets from coughs and sneezes; it causes fever and a red skin rash.
 Ask a Support pupil to explain one step, and a Stretch pupil to share their extension.</a:t>
             </a:r>
@@ -2161,9 +2161,9 @@
             <a:r>
               <a:rPr lang="en-US" dirty="0"/>
               <a:t>Answers — pupils mark their own in a different colour, then hands up for 3/3, 2/3, 1/3.
-1. A   A virus. Measles is a viral disease spread in droplets from coughs and sneezes; it causes fever and a red skin rash.
+1. B   A virus. Measles is a viral disease spread in droplets from coughs and sneezes; it causes fever and a red skin rash.
 2. bacterial. Salmonella bacteria are taken in with contaminated food; they and their toxins cause fever, cramps, vomiting and diarrhoea.
-3. A   By sexual contact or exchange of body fluids such as blood. HIV passes in body fluids: by sexual contact, or in blood when drug users share needles. Condoms and not sharing needles reduce its spread.
+3. C   By sexual contact or exchange of body fluids such as blood. HIV passes in body fluids: by sexual contact, or in blood when drug users share needles. Condoms and not sharing needles reduce its spread.
 Say the route each score points to: 3/3 Stretch, 2/3 Core, 0–1 Support. Pupils may choose to move up.</a:t>
             </a:r>
             <a:endParaRPr lang="en-US" dirty="0"/>
@@ -10620,7 +10620,7 @@
                 <a:ea typeface="Calibri" pitchFamily="34" charset="-122"/>
                 <a:cs typeface="Calibri" pitchFamily="34" charset="-120"/>
               </a:rPr>
-              <a:t>A virus</a:t>
+              <a:t>A protist</a:t>
             </a:r>
             <a:endParaRPr lang="en-US" sz="2400" dirty="0"/>
           </a:p>
@@ -10657,7 +10657,7 @@
                 <a:ea typeface="Calibri" pitchFamily="34" charset="-122"/>
                 <a:cs typeface="Calibri" pitchFamily="34" charset="-120"/>
               </a:rPr>
-              <a:t>A bacterium</a:t>
+              <a:t>A virus</a:t>
             </a:r>
             <a:endParaRPr lang="en-US" sz="2400" dirty="0"/>
           </a:p>
@@ -10731,7 +10731,7 @@
                 <a:ea typeface="Calibri" pitchFamily="34" charset="-122"/>
                 <a:cs typeface="Calibri" pitchFamily="34" charset="-120"/>
               </a:rPr>
-              <a:t>A protist</a:t>
+              <a:t>A bacterium</a:t>
             </a:r>
             <a:endParaRPr lang="en-US" sz="2400" dirty="0"/>
           </a:p>
@@ -11133,7 +11133,7 @@
                 <a:ea typeface="Calibri" pitchFamily="34" charset="-122"/>
                 <a:cs typeface="Calibri" pitchFamily="34" charset="-120"/>
               </a:rPr>
-              <a:t>By sexual contact or exchange of body fluids such as blood</a:t>
+              <a:t>In droplets from coughs and sneezes</a:t>
             </a:r>
             <a:endParaRPr lang="en-US" sz="2200" dirty="0"/>
           </a:p>
@@ -11170,7 +11170,7 @@
                 <a:ea typeface="Calibri" pitchFamily="34" charset="-122"/>
                 <a:cs typeface="Calibri" pitchFamily="34" charset="-120"/>
               </a:rPr>
-              <a:t>In droplets from coughs and sneezes</a:t>
+              <a:t>In contaminated food</a:t>
             </a:r>
             <a:endParaRPr lang="en-US" sz="2200" dirty="0"/>
           </a:p>
@@ -11207,7 +11207,7 @@
                 <a:ea typeface="Calibri" pitchFamily="34" charset="-122"/>
                 <a:cs typeface="Calibri" pitchFamily="34" charset="-120"/>
               </a:rPr>
-              <a:t>In contaminated food</a:t>
+              <a:t>By sexual contact or exchange of body fluids such as blood</a:t>
             </a:r>
             <a:endParaRPr lang="en-US" sz="2200" dirty="0"/>
           </a:p>
@@ -12679,7 +12679,7 @@
                 <a:ea typeface="Calibri" pitchFamily="34" charset="-122"/>
                 <a:cs typeface="Calibri" pitchFamily="34" charset="-120"/>
               </a:rPr>
-              <a:t>A bacterium</a:t>
+              <a:t>A virus</a:t>
             </a:r>
             <a:endParaRPr lang="en-US" sz="2400" dirty="0"/>
           </a:p>
@@ -12753,7 +12753,7 @@
                 <a:ea typeface="Calibri" pitchFamily="34" charset="-122"/>
                 <a:cs typeface="Calibri" pitchFamily="34" charset="-120"/>
               </a:rPr>
-              <a:t>A protist</a:t>
+              <a:t>A bacterium</a:t>
             </a:r>
             <a:endParaRPr lang="en-US" sz="2400" dirty="0"/>
           </a:p>
@@ -12790,7 +12790,7 @@
                 <a:ea typeface="Calibri" pitchFamily="34" charset="-122"/>
                 <a:cs typeface="Calibri" pitchFamily="34" charset="-120"/>
               </a:rPr>
-              <a:t>A virus</a:t>
+              <a:t>A protist</a:t>
             </a:r>
             <a:endParaRPr lang="en-US" sz="2400" dirty="0"/>
           </a:p>
@@ -14261,7 +14261,7 @@
                 <a:ea typeface="Cambria" pitchFamily="34" charset="-122"/>
                 <a:cs typeface="Cambria" pitchFamily="34" charset="-120"/>
               </a:rPr>
-              <a:t>D   A virus</a:t>
+              <a:t>A   A virus</a:t>
             </a:r>
             <a:endParaRPr lang="en-US" sz="1800" dirty="0"/>
           </a:p>
@@ -14782,7 +14782,7 @@
                 <a:ea typeface="Calibri" pitchFamily="34" charset="-122"/>
                 <a:cs typeface="Calibri" pitchFamily="34" charset="-120"/>
               </a:rPr>
-              <a:t>A   A virus</a:t>
+              <a:t>B   A virus</a:t>
             </a:r>
             <a:endParaRPr lang="en-US" sz="2200" dirty="0"/>
           </a:p>
@@ -15282,7 +15282,7 @@
                 <a:ea typeface="Calibri" pitchFamily="34" charset="-122"/>
                 <a:cs typeface="Calibri" pitchFamily="34" charset="-120"/>
               </a:rPr>
-              <a:t>A   By sexual contact or exchange of body fluids such as blood</a:t>
+              <a:t>C   By sexual contact or exchange of body fluids such as blood</a:t>
             </a:r>
             <a:endParaRPr lang="en-US" sz="2200" dirty="0"/>
           </a:p>

--- a/decks/triple-b5/triple-b5_ch5_bacterial-viral.pptx
+++ b/decks/triple-b5/triple-b5_ch5_bacterial-viral.pptx
@@ -130,30 +130,30 @@
   <p:extLst>
     <p:ext uri="{521415D9-36F7-43E2-AB2F-B90AF26B5E84}">
       <p14:sectionLst xmlns:p14="http://schemas.microsoft.com/office/powerpoint/2010/main">
-        <p14:section name="Opening" id="{782b4c9b-2279-f6ca-b493-6bc85331704b}">
+        <p14:section name="Opening" id="{a802114a-58e4-b6b1-c66c-6ef78105e804}">
           <p14:sldIdLst>
             <p14:sldId id="256"/>
           </p14:sldIdLst>
         </p14:section>
-        <p14:section name="Gate" id="{a2164055-a95c-4e6c-8e99-815b4947280d}">
+        <p14:section name="Gate" id="{a52292cf-3c54-3235-99f3-3c3151b40320}">
           <p14:sldIdLst>
             <p14:sldId id="257"/>
             <p14:sldId id="258"/>
           </p14:sldIdLst>
         </p14:section>
-        <p14:section name="Pre-teach" id="{268dc6fb-7cc3-d214-2d20-b7bd49c562cd}">
+        <p14:section name="Pre-teach" id="{0e3284b8-2402-c1d4-3905-80e4135dc5fe}">
           <p14:sldIdLst>
             <p14:sldId id="259"/>
             <p14:sldId id="260"/>
           </p14:sldIdLst>
         </p14:section>
-        <p14:section name="Read-along" id="{147f3d5e-48d5-83f6-7555-7334e50e94fd}">
+        <p14:section name="Read-along" id="{29467a38-5aa6-59ef-4ace-085bb557bbd6}">
           <p14:sldIdLst>
             <p14:sldId id="261"/>
             <p14:sldId id="262"/>
           </p14:sldIdLst>
         </p14:section>
-        <p14:section name="Teach" id="{d0b0f45e-ca7f-3776-00a3-be5c3aa8b950}">
+        <p14:section name="Teach" id="{bb653431-2e00-cfac-3066-ac8b6f25209a}">
           <p14:sldIdLst>
             <p14:sldId id="263"/>
             <p14:sldId id="264"/>
@@ -165,7 +165,7 @@
             <p14:sldId id="270"/>
           </p14:sldIdLst>
         </p14:section>
-        <p14:section name="Routes" id="{00c3d41e-a18a-8400-ebc4-96403ea1ef68}">
+        <p14:section name="Routes" id="{8fea18d8-b2cf-7501-942c-078e32b310c2}">
           <p14:sldIdLst>
             <p14:sldId id="271"/>
             <p14:sldId id="272"/>
@@ -174,12 +174,12 @@
             <p14:sldId id="275"/>
           </p14:sldIdLst>
         </p14:section>
-        <p14:section name="Close" id="{870ca783-7400-883b-7c7a-f3208c015c7c}">
+        <p14:section name="Close" id="{221ceab3-fb87-0ee9-1171-ff5ec0d17f48}">
           <p14:sldIdLst>
             <p14:sldId id="276"/>
           </p14:sldIdLst>
         </p14:section>
-        <p14:section name="Answers" id="{813c8c73-42a8-4bbf-1bad-03b8f52f8fad}">
+        <p14:section name="Answers" id="{5b244a2d-f80c-2587-dca6-c3fe6ae5e318}">
           <p14:sldIdLst>
             <p14:sldId id="277"/>
             <p14:sldId id="278"/>
